--- a/media/resources/files/Ekvivalenettuuluk_Onduktardan_menen_Payizga-3Tutashtyr.pptx
+++ b/media/resources/files/Ekvivalenettuuluk_Onduktardan_menen_Payizga-3Tutashtyr.pptx
@@ -3810,7 +3810,7 @@
                 <a:ea typeface="+mn-ea"/>
                 <a:cs typeface="+mn-cs"/>
               </a:rPr>
-              <a:t>Ошол команда үчүн квадратты талап кылуу үчүн жооп кутучасынын тиешелүү көлөкө тарабын чыкылдатыңыз/тийиңиз.</a:t>
+              <a:t>Ошол команданын квадратын ээлөө үчүн жооп кутучасынын боёлгон бөлүгүн басыңыз.</a:t>
             </a:r>
           </a:p>
           <a:p>
@@ -6001,7 +6001,7 @@
                           <a:latin typeface="Arial" panose="020B0604020202020204" pitchFamily="34" charset="0"/>
                           <a:cs typeface="Arial" panose="020B0604020202020204" pitchFamily="34" charset="0"/>
                         </a:rPr>
-                        <a:t>0.3</a:t>
+                        <a:t>0,3</a:t>
                       </a:r>
                     </a:p>
                   </a:txBody>
@@ -6058,7 +6058,7 @@
                           <a:latin typeface="Arial" panose="020B0604020202020204" pitchFamily="34" charset="0"/>
                           <a:cs typeface="Arial" panose="020B0604020202020204" pitchFamily="34" charset="0"/>
                         </a:rPr>
-                        <a:t>0.8</a:t>
+                        <a:t>0,8</a:t>
                       </a:r>
                     </a:p>
                   </a:txBody>
@@ -6122,7 +6122,7 @@
                           <a:latin typeface="Arial" panose="020B0604020202020204" pitchFamily="34" charset="0"/>
                           <a:cs typeface="Arial" panose="020B0604020202020204" pitchFamily="34" charset="0"/>
                         </a:rPr>
-                        <a:t>0.2</a:t>
+                        <a:t>0,2</a:t>
                       </a:r>
                     </a:p>
                   </a:txBody>
@@ -6179,7 +6179,7 @@
                           <a:latin typeface="Arial" panose="020B0604020202020204" pitchFamily="34" charset="0"/>
                           <a:cs typeface="Arial" panose="020B0604020202020204" pitchFamily="34" charset="0"/>
                         </a:rPr>
-                        <a:t>0.85</a:t>
+                        <a:t>0,85</a:t>
                       </a:r>
                     </a:p>
                   </a:txBody>
@@ -6243,7 +6243,7 @@
                           <a:latin typeface="Arial" panose="020B0604020202020204" pitchFamily="34" charset="0"/>
                           <a:cs typeface="Arial" panose="020B0604020202020204" pitchFamily="34" charset="0"/>
                         </a:rPr>
-                        <a:t>0.65</a:t>
+                        <a:t>0,65</a:t>
                       </a:r>
                     </a:p>
                   </a:txBody>
@@ -6300,7 +6300,7 @@
                           <a:latin typeface="Arial" panose="020B0604020202020204" pitchFamily="34" charset="0"/>
                           <a:cs typeface="Arial" panose="020B0604020202020204" pitchFamily="34" charset="0"/>
                         </a:rPr>
-                        <a:t>0.5</a:t>
+                        <a:t>0,5</a:t>
                       </a:r>
                     </a:p>
                   </a:txBody>
@@ -6364,7 +6364,7 @@
                           <a:latin typeface="Arial" panose="020B0604020202020204" pitchFamily="34" charset="0"/>
                           <a:cs typeface="Arial" panose="020B0604020202020204" pitchFamily="34" charset="0"/>
                         </a:rPr>
-                        <a:t>0.9</a:t>
+                        <a:t>0,9</a:t>
                       </a:r>
                     </a:p>
                   </a:txBody>
@@ -6421,7 +6421,7 @@
                           <a:latin typeface="Arial" panose="020B0604020202020204" pitchFamily="34" charset="0"/>
                           <a:cs typeface="Arial" panose="020B0604020202020204" pitchFamily="34" charset="0"/>
                         </a:rPr>
-                        <a:t>0.1</a:t>
+                        <a:t>0,1</a:t>
                       </a:r>
                     </a:p>
                   </a:txBody>
@@ -6485,7 +6485,7 @@
                           <a:latin typeface="Arial" panose="020B0604020202020204" pitchFamily="34" charset="0"/>
                           <a:cs typeface="Arial" panose="020B0604020202020204" pitchFamily="34" charset="0"/>
                         </a:rPr>
-                        <a:t>0.15</a:t>
+                        <a:t>0,15</a:t>
                       </a:r>
                     </a:p>
                   </a:txBody>
@@ -6542,7 +6542,7 @@
                           <a:latin typeface="Arial" panose="020B0604020202020204" pitchFamily="34" charset="0"/>
                           <a:cs typeface="Arial" panose="020B0604020202020204" pitchFamily="34" charset="0"/>
                         </a:rPr>
-                        <a:t>0.6</a:t>
+                        <a:t>0,6</a:t>
                       </a:r>
                     </a:p>
                   </a:txBody>
@@ -6606,7 +6606,7 @@
                           <a:latin typeface="Arial" panose="020B0604020202020204" pitchFamily="34" charset="0"/>
                           <a:cs typeface="Arial" panose="020B0604020202020204" pitchFamily="34" charset="0"/>
                         </a:rPr>
-                        <a:t>0.4</a:t>
+                        <a:t>0,4</a:t>
                       </a:r>
                     </a:p>
                   </a:txBody>
@@ -6663,7 +6663,7 @@
                           <a:latin typeface="Arial" panose="020B0604020202020204" pitchFamily="34" charset="0"/>
                           <a:cs typeface="Arial" panose="020B0604020202020204" pitchFamily="34" charset="0"/>
                         </a:rPr>
-                        <a:t>0.25</a:t>
+                        <a:t>0,25</a:t>
                       </a:r>
                     </a:p>
                   </a:txBody>
@@ -6727,7 +6727,7 @@
                           <a:latin typeface="Arial" panose="020B0604020202020204" pitchFamily="34" charset="0"/>
                           <a:cs typeface="Arial" panose="020B0604020202020204" pitchFamily="34" charset="0"/>
                         </a:rPr>
-                        <a:t>1.0</a:t>
+                        <a:t>1,0</a:t>
                       </a:r>
                     </a:p>
                   </a:txBody>
@@ -6784,7 +6784,7 @@
                           <a:latin typeface="Arial" panose="020B0604020202020204" pitchFamily="34" charset="0"/>
                           <a:cs typeface="Arial" panose="020B0604020202020204" pitchFamily="34" charset="0"/>
                         </a:rPr>
-                        <a:t>0.7</a:t>
+                        <a:t>0,7</a:t>
                       </a:r>
                     </a:p>
                   </a:txBody>
@@ -6848,7 +6848,7 @@
                           <a:latin typeface="Arial" panose="020B0604020202020204" pitchFamily="34" charset="0"/>
                           <a:cs typeface="Arial" panose="020B0604020202020204" pitchFamily="34" charset="0"/>
                         </a:rPr>
-                        <a:t>0.95</a:t>
+                        <a:t>0,95</a:t>
                       </a:r>
                     </a:p>
                   </a:txBody>
@@ -6905,7 +6905,7 @@
                           <a:latin typeface="Arial" panose="020B0604020202020204" pitchFamily="34" charset="0"/>
                           <a:cs typeface="Arial" panose="020B0604020202020204" pitchFamily="34" charset="0"/>
                         </a:rPr>
-                        <a:t>0.35</a:t>
+                        <a:t>0,35</a:t>
                       </a:r>
                     </a:p>
                   </a:txBody>
@@ -17867,7 +17867,7 @@
                             <a:schemeClr val="tx1"/>
                           </a:solidFill>
                         </a:rPr>
-                        <a:t>2.9%</a:t>
+                        <a:t>2,9%</a:t>
                       </a:r>
                     </a:p>
                   </a:txBody>
@@ -19162,7 +19162,7 @@
                           <a:latin typeface="Arial" panose="020B0604020202020204" pitchFamily="34" charset="0"/>
                           <a:cs typeface="Arial" panose="020B0604020202020204" pitchFamily="34" charset="0"/>
                         </a:rPr>
-                        <a:t>0.16</a:t>
+                        <a:t>0,16</a:t>
                       </a:r>
                     </a:p>
                   </a:txBody>
@@ -19219,7 +19219,7 @@
                           <a:latin typeface="Arial" panose="020B0604020202020204" pitchFamily="34" charset="0"/>
                           <a:cs typeface="Arial" panose="020B0604020202020204" pitchFamily="34" charset="0"/>
                         </a:rPr>
-                        <a:t>0.7</a:t>
+                        <a:t>0,7</a:t>
                       </a:r>
                     </a:p>
                   </a:txBody>
@@ -19283,7 +19283,7 @@
                           <a:latin typeface="Arial" panose="020B0604020202020204" pitchFamily="34" charset="0"/>
                           <a:cs typeface="Arial" panose="020B0604020202020204" pitchFamily="34" charset="0"/>
                         </a:rPr>
-                        <a:t>0.03</a:t>
+                        <a:t>0,03</a:t>
                       </a:r>
                     </a:p>
                   </a:txBody>
@@ -19340,7 +19340,7 @@
                           <a:latin typeface="Arial" panose="020B0604020202020204" pitchFamily="34" charset="0"/>
                           <a:cs typeface="Arial" panose="020B0604020202020204" pitchFamily="34" charset="0"/>
                         </a:rPr>
-                        <a:t>0.12</a:t>
+                        <a:t>0,12</a:t>
                       </a:r>
                     </a:p>
                   </a:txBody>
@@ -19404,7 +19404,7 @@
                           <a:latin typeface="Arial" panose="020B0604020202020204" pitchFamily="34" charset="0"/>
                           <a:cs typeface="Arial" panose="020B0604020202020204" pitchFamily="34" charset="0"/>
                         </a:rPr>
-                        <a:t>0.42</a:t>
+                        <a:t>0,42</a:t>
                       </a:r>
                     </a:p>
                   </a:txBody>
@@ -19461,7 +19461,7 @@
                           <a:latin typeface="Arial" panose="020B0604020202020204" pitchFamily="34" charset="0"/>
                           <a:cs typeface="Arial" panose="020B0604020202020204" pitchFamily="34" charset="0"/>
                         </a:rPr>
-                        <a:t>0.07</a:t>
+                        <a:t>0,07</a:t>
                       </a:r>
                     </a:p>
                   </a:txBody>
@@ -19525,7 +19525,7 @@
                           <a:latin typeface="Arial" panose="020B0604020202020204" pitchFamily="34" charset="0"/>
                           <a:cs typeface="Arial" panose="020B0604020202020204" pitchFamily="34" charset="0"/>
                         </a:rPr>
-                        <a:t>1.5</a:t>
+                        <a:t>1,5</a:t>
                       </a:r>
                     </a:p>
                   </a:txBody>
@@ -19582,7 +19582,7 @@
                           <a:latin typeface="Arial" panose="020B0604020202020204" pitchFamily="34" charset="0"/>
                           <a:cs typeface="Arial" panose="020B0604020202020204" pitchFamily="34" charset="0"/>
                         </a:rPr>
-                        <a:t>0.5</a:t>
+                        <a:t>0,5</a:t>
                       </a:r>
                     </a:p>
                   </a:txBody>
@@ -19646,7 +19646,7 @@
                           <a:latin typeface="Arial" panose="020B0604020202020204" pitchFamily="34" charset="0"/>
                           <a:cs typeface="Arial" panose="020B0604020202020204" pitchFamily="34" charset="0"/>
                         </a:rPr>
-                        <a:t>0.029</a:t>
+                        <a:t>0,029</a:t>
                       </a:r>
                     </a:p>
                   </a:txBody>
@@ -19703,7 +19703,7 @@
                           <a:latin typeface="Arial" panose="020B0604020202020204" pitchFamily="34" charset="0"/>
                           <a:cs typeface="Arial" panose="020B0604020202020204" pitchFamily="34" charset="0"/>
                         </a:rPr>
-                        <a:t>1.2</a:t>
+                        <a:t>1,2</a:t>
                       </a:r>
                     </a:p>
                   </a:txBody>
@@ -19767,7 +19767,7 @@
                           <a:latin typeface="Arial" panose="020B0604020202020204" pitchFamily="34" charset="0"/>
                           <a:cs typeface="Arial" panose="020B0604020202020204" pitchFamily="34" charset="0"/>
                         </a:rPr>
-                        <a:t>0.3</a:t>
+                        <a:t>0,3</a:t>
                       </a:r>
                     </a:p>
                   </a:txBody>
@@ -19824,7 +19824,7 @@
                           <a:latin typeface="Arial" panose="020B0604020202020204" pitchFamily="34" charset="0"/>
                           <a:cs typeface="Arial" panose="020B0604020202020204" pitchFamily="34" charset="0"/>
                         </a:rPr>
-                        <a:t>0.15</a:t>
+                        <a:t>0,15</a:t>
                       </a:r>
                     </a:p>
                   </a:txBody>
@@ -19888,7 +19888,7 @@
                           <a:latin typeface="Arial" panose="020B0604020202020204" pitchFamily="34" charset="0"/>
                           <a:cs typeface="Arial" panose="020B0604020202020204" pitchFamily="34" charset="0"/>
                         </a:rPr>
-                        <a:t>1.05</a:t>
+                        <a:t>1,05</a:t>
                       </a:r>
                     </a:p>
                   </a:txBody>
@@ -19945,7 +19945,7 @@
                           <a:latin typeface="Arial" panose="020B0604020202020204" pitchFamily="34" charset="0"/>
                           <a:cs typeface="Arial" panose="020B0604020202020204" pitchFamily="34" charset="0"/>
                         </a:rPr>
-                        <a:t>0.27</a:t>
+                        <a:t>0,27</a:t>
                       </a:r>
                     </a:p>
                   </a:txBody>
@@ -20009,7 +20009,7 @@
                           <a:latin typeface="Arial" panose="020B0604020202020204" pitchFamily="34" charset="0"/>
                           <a:cs typeface="Arial" panose="020B0604020202020204" pitchFamily="34" charset="0"/>
                         </a:rPr>
-                        <a:t>1.02</a:t>
+                        <a:t>1,02</a:t>
                       </a:r>
                     </a:p>
                   </a:txBody>
@@ -20066,7 +20066,7 @@
                           <a:latin typeface="Arial" panose="020B0604020202020204" pitchFamily="34" charset="0"/>
                           <a:cs typeface="Arial" panose="020B0604020202020204" pitchFamily="34" charset="0"/>
                         </a:rPr>
-                        <a:t>1.4</a:t>
+                        <a:t>1,4</a:t>
                       </a:r>
                     </a:p>
                   </a:txBody>
